--- a/Randarea Apei folosind Metoda Sumei Sinusurilor.pptx
+++ b/Randarea Apei folosind Metoda Sumei Sinusurilor.pptx
@@ -6478,13 +6478,13 @@
   <p:clrMapOvr>
     <a:masterClrMapping/>
   </p:clrMapOvr>
-  <mc:AlternateContent xmlns:mc="http://schemas.openxmlformats.org/markup-compatibility/2006">
-    <mc:Choice xmlns:p14="http://schemas.microsoft.com/office/powerpoint/2010/main" Requires="p14">
+  <mc:AlternateContent xmlns:mc="http://schemas.openxmlformats.org/markup-compatibility/2006" xmlns:p14="http://schemas.microsoft.com/office/powerpoint/2010/main">
+    <mc:Choice Requires="p14">
       <p:transition spd="slow" p14:dur="1400">
         <p14:ripple/>
       </p:transition>
     </mc:Choice>
-    <mc:Fallback>
+    <mc:Fallback xmlns="">
       <p:transition spd="slow">
         <p:fade/>
       </p:transition>
@@ -7003,13 +7003,13 @@
   <p:clrMapOvr>
     <a:masterClrMapping/>
   </p:clrMapOvr>
-  <mc:AlternateContent xmlns:mc="http://schemas.openxmlformats.org/markup-compatibility/2006">
-    <mc:Choice xmlns:p14="http://schemas.microsoft.com/office/powerpoint/2010/main" Requires="p14">
+  <mc:AlternateContent xmlns:mc="http://schemas.openxmlformats.org/markup-compatibility/2006" xmlns:p14="http://schemas.microsoft.com/office/powerpoint/2010/main">
+    <mc:Choice Requires="p14">
       <p:transition spd="slow" p14:dur="1400">
         <p14:ripple/>
       </p:transition>
     </mc:Choice>
-    <mc:Fallback>
+    <mc:Fallback xmlns="">
       <p:transition spd="slow">
         <p:fade/>
       </p:transition>
@@ -7121,13 +7121,13 @@
   <p:clrMapOvr>
     <a:masterClrMapping/>
   </p:clrMapOvr>
-  <mc:AlternateContent xmlns:mc="http://schemas.openxmlformats.org/markup-compatibility/2006">
-    <mc:Choice xmlns:p14="http://schemas.microsoft.com/office/powerpoint/2010/main" Requires="p14">
+  <mc:AlternateContent xmlns:mc="http://schemas.openxmlformats.org/markup-compatibility/2006" xmlns:p14="http://schemas.microsoft.com/office/powerpoint/2010/main">
+    <mc:Choice Requires="p14">
       <p:transition spd="slow" p14:dur="1400">
         <p14:ripple/>
       </p:transition>
     </mc:Choice>
-    <mc:Fallback>
+    <mc:Fallback xmlns="">
       <p:transition spd="slow">
         <p:fade/>
       </p:transition>
@@ -7216,13 +7216,13 @@
   <p:clrMapOvr>
     <a:masterClrMapping/>
   </p:clrMapOvr>
-  <mc:AlternateContent xmlns:mc="http://schemas.openxmlformats.org/markup-compatibility/2006">
-    <mc:Choice xmlns:p14="http://schemas.microsoft.com/office/powerpoint/2010/main" Requires="p14">
+  <mc:AlternateContent xmlns:mc="http://schemas.openxmlformats.org/markup-compatibility/2006" xmlns:p14="http://schemas.microsoft.com/office/powerpoint/2010/main">
+    <mc:Choice Requires="p14">
       <p:transition spd="slow" p14:dur="1400">
         <p14:ripple/>
       </p:transition>
     </mc:Choice>
-    <mc:Fallback>
+    <mc:Fallback xmlns="">
       <p:transition spd="slow">
         <p:fade/>
       </p:transition>
@@ -8215,13 +8215,13 @@
   <p:clrMapOvr>
     <a:masterClrMapping/>
   </p:clrMapOvr>
-  <mc:AlternateContent xmlns:mc="http://schemas.openxmlformats.org/markup-compatibility/2006">
-    <mc:Choice xmlns:p14="http://schemas.microsoft.com/office/powerpoint/2010/main" Requires="p14">
+  <mc:AlternateContent xmlns:mc="http://schemas.openxmlformats.org/markup-compatibility/2006" xmlns:p14="http://schemas.microsoft.com/office/powerpoint/2010/main">
+    <mc:Choice Requires="p14">
       <p:transition spd="slow" p14:dur="1400">
         <p14:ripple/>
       </p:transition>
     </mc:Choice>
-    <mc:Fallback>
+    <mc:Fallback xmlns="">
       <p:transition spd="slow">
         <p:fade/>
       </p:transition>
@@ -8727,13 +8727,13 @@
   <p:clrMapOvr>
     <a:masterClrMapping/>
   </p:clrMapOvr>
-  <mc:AlternateContent xmlns:mc="http://schemas.openxmlformats.org/markup-compatibility/2006">
-    <mc:Choice xmlns:p14="http://schemas.microsoft.com/office/powerpoint/2010/main" Requires="p14">
+  <mc:AlternateContent xmlns:mc="http://schemas.openxmlformats.org/markup-compatibility/2006" xmlns:p14="http://schemas.microsoft.com/office/powerpoint/2010/main">
+    <mc:Choice Requires="p14">
       <p:transition spd="slow" p14:dur="1400">
         <p14:ripple/>
       </p:transition>
     </mc:Choice>
-    <mc:Fallback>
+    <mc:Fallback xmlns="">
       <p:transition spd="slow">
         <p:fade/>
       </p:transition>
@@ -8777,7 +8777,7 @@
         </p:nvSpPr>
         <p:spPr>
           <a:xfrm>
-            <a:off x="602731" y="250310"/>
+            <a:off x="3581321" y="-195809"/>
             <a:ext cx="8534400" cy="1507067"/>
           </a:xfrm>
         </p:spPr>
@@ -8825,333 +8825,14 @@
         </p:blipFill>
         <p:spPr>
           <a:xfrm>
-            <a:off x="602731" y="1561149"/>
-            <a:ext cx="5834283" cy="4764959"/>
+            <a:off x="3079270" y="941955"/>
+            <a:ext cx="6825221" cy="5574275"/>
           </a:xfrm>
           <a:prstGeom prst="rect">
             <a:avLst/>
           </a:prstGeom>
         </p:spPr>
       </p:pic>
-      <p:sp>
-        <p:nvSpPr>
-          <p:cNvPr id="5" name="Content Placeholder 4">
-            <a:extLst>
-              <a:ext uri="{FF2B5EF4-FFF2-40B4-BE49-F238E27FC236}">
-                <a16:creationId xmlns:a16="http://schemas.microsoft.com/office/drawing/2014/main" id="{5C0ED8A1-D80E-D765-F897-DD259C6FF099}"/>
-              </a:ext>
-            </a:extLst>
-          </p:cNvPr>
-          <p:cNvSpPr>
-            <a:spLocks noGrp="1"/>
-          </p:cNvSpPr>
-          <p:nvPr>
-            <p:ph sz="half" idx="2"/>
-          </p:nvPr>
-        </p:nvSpPr>
-        <p:spPr>
-          <a:xfrm>
-            <a:off x="6527549" y="1925839"/>
-            <a:ext cx="4934479" cy="3615266"/>
-          </a:xfrm>
-        </p:spPr>
-        <p:txBody>
-          <a:bodyPr>
-            <a:normAutofit/>
-          </a:bodyPr>
-          <a:lstStyle/>
-          <a:p>
-            <a:r>
-              <a:rPr lang="en-US" sz="2800" dirty="0" err="1">
-                <a:solidFill>
-                  <a:schemeClr val="tx1"/>
-                </a:solidFill>
-              </a:rPr>
-              <a:t>Pentru</a:t>
-            </a:r>
-            <a:r>
-              <a:rPr lang="en-US" sz="2800" dirty="0">
-                <a:solidFill>
-                  <a:schemeClr val="tx1"/>
-                </a:solidFill>
-              </a:rPr>
-              <a:t> a </a:t>
-            </a:r>
-            <a:r>
-              <a:rPr lang="en-US" sz="2800" dirty="0" err="1">
-                <a:solidFill>
-                  <a:schemeClr val="tx1"/>
-                </a:solidFill>
-              </a:rPr>
-              <a:t>gestiona</a:t>
-            </a:r>
-            <a:r>
-              <a:rPr lang="en-US" sz="2800" dirty="0">
-                <a:solidFill>
-                  <a:schemeClr val="tx1"/>
-                </a:solidFill>
-              </a:rPr>
-              <a:t> </a:t>
-            </a:r>
-            <a:r>
-              <a:rPr lang="en-US" sz="2800" dirty="0" err="1">
-                <a:solidFill>
-                  <a:schemeClr val="tx1"/>
-                </a:solidFill>
-              </a:rPr>
-              <a:t>mai</a:t>
-            </a:r>
-            <a:r>
-              <a:rPr lang="en-US" sz="2800" dirty="0">
-                <a:solidFill>
-                  <a:schemeClr val="tx1"/>
-                </a:solidFill>
-              </a:rPr>
-              <a:t> </a:t>
-            </a:r>
-            <a:r>
-              <a:rPr lang="en-US" sz="2800" dirty="0" err="1">
-                <a:solidFill>
-                  <a:schemeClr val="tx1"/>
-                </a:solidFill>
-              </a:rPr>
-              <a:t>ușor</a:t>
-            </a:r>
-            <a:r>
-              <a:rPr lang="en-US" sz="2800" dirty="0">
-                <a:solidFill>
-                  <a:schemeClr val="tx1"/>
-                </a:solidFill>
-              </a:rPr>
-              <a:t> </a:t>
-            </a:r>
-            <a:r>
-              <a:rPr lang="en-US" sz="2800" dirty="0" err="1">
-                <a:solidFill>
-                  <a:schemeClr val="tx1"/>
-                </a:solidFill>
-              </a:rPr>
-              <a:t>fiecare</a:t>
-            </a:r>
-            <a:r>
-              <a:rPr lang="en-US" sz="2800" dirty="0">
-                <a:solidFill>
-                  <a:schemeClr val="tx1"/>
-                </a:solidFill>
-              </a:rPr>
-              <a:t> </a:t>
-            </a:r>
-            <a:r>
-              <a:rPr lang="en-US" sz="2800" dirty="0" err="1">
-                <a:solidFill>
-                  <a:schemeClr val="tx1"/>
-                </a:solidFill>
-              </a:rPr>
-              <a:t>obiect</a:t>
-            </a:r>
-            <a:r>
-              <a:rPr lang="en-US" sz="2800" dirty="0">
-                <a:solidFill>
-                  <a:schemeClr val="tx1"/>
-                </a:solidFill>
-              </a:rPr>
-              <a:t> al </a:t>
-            </a:r>
-            <a:r>
-              <a:rPr lang="en-US" sz="2800" dirty="0" err="1">
-                <a:solidFill>
-                  <a:schemeClr val="tx1"/>
-                </a:solidFill>
-              </a:rPr>
-              <a:t>scenei</a:t>
-            </a:r>
-            <a:r>
-              <a:rPr lang="en-US" sz="2800" dirty="0">
-                <a:solidFill>
-                  <a:schemeClr val="tx1"/>
-                </a:solidFill>
-              </a:rPr>
-              <a:t> am </a:t>
-            </a:r>
-            <a:r>
-              <a:rPr lang="en-US" sz="2800" dirty="0" err="1">
-                <a:solidFill>
-                  <a:schemeClr val="tx1"/>
-                </a:solidFill>
-              </a:rPr>
-              <a:t>creat</a:t>
-            </a:r>
-            <a:r>
-              <a:rPr lang="en-US" sz="2800" dirty="0">
-                <a:solidFill>
-                  <a:schemeClr val="tx1"/>
-                </a:solidFill>
-              </a:rPr>
-              <a:t> o </a:t>
-            </a:r>
-            <a:r>
-              <a:rPr lang="en-US" sz="2800" dirty="0" err="1">
-                <a:solidFill>
-                  <a:schemeClr val="tx1"/>
-                </a:solidFill>
-              </a:rPr>
-              <a:t>clasă</a:t>
-            </a:r>
-            <a:r>
-              <a:rPr lang="en-US" sz="2800" dirty="0">
-                <a:solidFill>
-                  <a:schemeClr val="tx1"/>
-                </a:solidFill>
-              </a:rPr>
-              <a:t> </a:t>
-            </a:r>
-            <a:r>
-              <a:rPr lang="en-US" sz="2800" dirty="0" err="1">
-                <a:solidFill>
-                  <a:schemeClr val="tx1"/>
-                </a:solidFill>
-              </a:rPr>
-              <a:t>abstractă</a:t>
-            </a:r>
-            <a:r>
-              <a:rPr lang="en-US" sz="2800" dirty="0">
-                <a:solidFill>
-                  <a:schemeClr val="tx1"/>
-                </a:solidFill>
-              </a:rPr>
-              <a:t> de </a:t>
-            </a:r>
-            <a:r>
-              <a:rPr lang="en-US" sz="2800" dirty="0" err="1">
-                <a:solidFill>
-                  <a:schemeClr val="tx1"/>
-                </a:solidFill>
-              </a:rPr>
-              <a:t>bază</a:t>
-            </a:r>
-            <a:r>
-              <a:rPr lang="en-US" sz="2800" dirty="0">
-                <a:solidFill>
-                  <a:schemeClr val="tx1"/>
-                </a:solidFill>
-              </a:rPr>
-              <a:t> </a:t>
-            </a:r>
-            <a:r>
-              <a:rPr lang="en-US" sz="2800" dirty="0" err="1">
-                <a:solidFill>
-                  <a:schemeClr val="tx1"/>
-                </a:solidFill>
-              </a:rPr>
-              <a:t>numită</a:t>
-            </a:r>
-            <a:r>
-              <a:rPr lang="en-US" sz="2800" dirty="0">
-                <a:solidFill>
-                  <a:schemeClr val="tx1"/>
-                </a:solidFill>
-              </a:rPr>
-              <a:t> Entity </a:t>
-            </a:r>
-            <a:r>
-              <a:rPr lang="en-US" sz="2800" dirty="0" err="1">
-                <a:solidFill>
-                  <a:schemeClr val="tx1"/>
-                </a:solidFill>
-              </a:rPr>
-              <a:t>ce</a:t>
-            </a:r>
-            <a:r>
-              <a:rPr lang="en-US" sz="2800" dirty="0">
-                <a:solidFill>
-                  <a:schemeClr val="tx1"/>
-                </a:solidFill>
-              </a:rPr>
-              <a:t> </a:t>
-            </a:r>
-            <a:r>
-              <a:rPr lang="en-US" sz="2800" dirty="0" err="1">
-                <a:solidFill>
-                  <a:schemeClr val="tx1"/>
-                </a:solidFill>
-              </a:rPr>
-              <a:t>este</a:t>
-            </a:r>
-            <a:r>
-              <a:rPr lang="en-US" sz="2800" dirty="0">
-                <a:solidFill>
-                  <a:schemeClr val="tx1"/>
-                </a:solidFill>
-              </a:rPr>
-              <a:t> </a:t>
-            </a:r>
-            <a:r>
-              <a:rPr lang="en-US" sz="2800" dirty="0" err="1">
-                <a:solidFill>
-                  <a:schemeClr val="tx1"/>
-                </a:solidFill>
-              </a:rPr>
-              <a:t>moștenită</a:t>
-            </a:r>
-            <a:r>
-              <a:rPr lang="en-US" sz="2800" dirty="0">
-                <a:solidFill>
-                  <a:schemeClr val="tx1"/>
-                </a:solidFill>
-              </a:rPr>
-              <a:t> de </a:t>
-            </a:r>
-            <a:r>
-              <a:rPr lang="en-US" sz="2800" dirty="0" err="1">
-                <a:solidFill>
-                  <a:schemeClr val="tx1"/>
-                </a:solidFill>
-              </a:rPr>
-              <a:t>fiecare</a:t>
-            </a:r>
-            <a:r>
-              <a:rPr lang="en-US" sz="2800" dirty="0">
-                <a:solidFill>
-                  <a:schemeClr val="tx1"/>
-                </a:solidFill>
-              </a:rPr>
-              <a:t> </a:t>
-            </a:r>
-            <a:r>
-              <a:rPr lang="en-US" sz="2800" dirty="0" err="1">
-                <a:solidFill>
-                  <a:schemeClr val="tx1"/>
-                </a:solidFill>
-              </a:rPr>
-              <a:t>obiect</a:t>
-            </a:r>
-            <a:r>
-              <a:rPr lang="en-US" sz="2800" dirty="0">
-                <a:solidFill>
-                  <a:schemeClr val="tx1"/>
-                </a:solidFill>
-              </a:rPr>
-              <a:t> (</a:t>
-            </a:r>
-            <a:r>
-              <a:rPr lang="en-US" sz="2800" dirty="0" err="1">
-                <a:solidFill>
-                  <a:schemeClr val="tx1"/>
-                </a:solidFill>
-              </a:rPr>
-              <a:t>apă</a:t>
-            </a:r>
-            <a:r>
-              <a:rPr lang="en-US" sz="2800" dirty="0">
-                <a:solidFill>
-                  <a:schemeClr val="tx1"/>
-                </a:solidFill>
-              </a:rPr>
-              <a:t>, skybox, model).</a:t>
-            </a:r>
-          </a:p>
-        </p:txBody>
-      </p:sp>
     </p:spTree>
     <p:extLst>
       <p:ext uri="{BB962C8B-B14F-4D97-AF65-F5344CB8AC3E}">
@@ -9162,13 +8843,13 @@
   <p:clrMapOvr>
     <a:masterClrMapping/>
   </p:clrMapOvr>
-  <mc:AlternateContent xmlns:mc="http://schemas.openxmlformats.org/markup-compatibility/2006">
-    <mc:Choice xmlns:p14="http://schemas.microsoft.com/office/powerpoint/2010/main" Requires="p14">
+  <mc:AlternateContent xmlns:mc="http://schemas.openxmlformats.org/markup-compatibility/2006" xmlns:p14="http://schemas.microsoft.com/office/powerpoint/2010/main">
+    <mc:Choice Requires="p14">
       <p:transition spd="slow" p14:dur="1400">
         <p14:ripple/>
       </p:transition>
     </mc:Choice>
-    <mc:Fallback>
+    <mc:Fallback xmlns="">
       <p:transition spd="slow">
         <p:fade/>
       </p:transition>
@@ -10037,13 +9718,13 @@
   <p:clrMapOvr>
     <a:masterClrMapping/>
   </p:clrMapOvr>
-  <mc:AlternateContent xmlns:mc="http://schemas.openxmlformats.org/markup-compatibility/2006">
-    <mc:Choice xmlns:p14="http://schemas.microsoft.com/office/powerpoint/2010/main" Requires="p14">
+  <mc:AlternateContent xmlns:mc="http://schemas.openxmlformats.org/markup-compatibility/2006" xmlns:p14="http://schemas.microsoft.com/office/powerpoint/2010/main">
+    <mc:Choice Requires="p14">
       <p:transition spd="slow" p14:dur="1400">
         <p14:ripple/>
       </p:transition>
     </mc:Choice>
-    <mc:Fallback>
+    <mc:Fallback xmlns="">
       <p:transition spd="slow">
         <p:fade/>
       </p:transition>
@@ -10741,13 +10422,13 @@
   <p:clrMapOvr>
     <a:masterClrMapping/>
   </p:clrMapOvr>
-  <mc:AlternateContent xmlns:mc="http://schemas.openxmlformats.org/markup-compatibility/2006">
-    <mc:Choice xmlns:p14="http://schemas.microsoft.com/office/powerpoint/2010/main" Requires="p14">
+  <mc:AlternateContent xmlns:mc="http://schemas.openxmlformats.org/markup-compatibility/2006" xmlns:p14="http://schemas.microsoft.com/office/powerpoint/2010/main">
+    <mc:Choice Requires="p14">
       <p:transition spd="slow" p14:dur="1400">
         <p14:ripple/>
       </p:transition>
     </mc:Choice>
-    <mc:Fallback>
+    <mc:Fallback xmlns="">
       <p:transition spd="slow">
         <p:fade/>
       </p:transition>
@@ -11266,13 +10947,13 @@
   <p:clrMapOvr>
     <a:masterClrMapping/>
   </p:clrMapOvr>
-  <mc:AlternateContent xmlns:mc="http://schemas.openxmlformats.org/markup-compatibility/2006">
-    <mc:Choice xmlns:p14="http://schemas.microsoft.com/office/powerpoint/2010/main" Requires="p14">
+  <mc:AlternateContent xmlns:mc="http://schemas.openxmlformats.org/markup-compatibility/2006" xmlns:p14="http://schemas.microsoft.com/office/powerpoint/2010/main">
+    <mc:Choice Requires="p14">
       <p:transition spd="slow" p14:dur="1400">
         <p14:ripple/>
       </p:transition>
     </mc:Choice>
-    <mc:Fallback>
+    <mc:Fallback xmlns="">
       <p:transition spd="slow">
         <p:fade/>
       </p:transition>
@@ -12012,13 +11693,13 @@
   <p:clrMapOvr>
     <a:masterClrMapping/>
   </p:clrMapOvr>
-  <mc:AlternateContent xmlns:mc="http://schemas.openxmlformats.org/markup-compatibility/2006">
-    <mc:Choice xmlns:p14="http://schemas.microsoft.com/office/powerpoint/2010/main" Requires="p14">
+  <mc:AlternateContent xmlns:mc="http://schemas.openxmlformats.org/markup-compatibility/2006" xmlns:p14="http://schemas.microsoft.com/office/powerpoint/2010/main">
+    <mc:Choice Requires="p14">
       <p:transition spd="slow" p14:dur="1400">
         <p14:ripple/>
       </p:transition>
     </mc:Choice>
-    <mc:Fallback>
+    <mc:Fallback xmlns="">
       <p:transition spd="slow">
         <p:fade/>
       </p:transition>
@@ -12120,13 +11801,13 @@
   <p:clrMapOvr>
     <a:masterClrMapping/>
   </p:clrMapOvr>
-  <mc:AlternateContent xmlns:mc="http://schemas.openxmlformats.org/markup-compatibility/2006">
-    <mc:Choice xmlns:p14="http://schemas.microsoft.com/office/powerpoint/2010/main" Requires="p14">
+  <mc:AlternateContent xmlns:mc="http://schemas.openxmlformats.org/markup-compatibility/2006" xmlns:p14="http://schemas.microsoft.com/office/powerpoint/2010/main">
+    <mc:Choice Requires="p14">
       <p:transition spd="slow" p14:dur="1400">
         <p14:ripple/>
       </p:transition>
     </mc:Choice>
-    <mc:Fallback>
+    <mc:Fallback xmlns="">
       <p:transition spd="slow">
         <p:fade/>
       </p:transition>
